--- a/presentation.pptx
+++ b/presentation.pptx
@@ -5,7 +5,7 @@
     <p:sldMasterId id="2147483648" r:id="rId1"/>
   </p:sldMasterIdLst>
   <p:notesMasterIdLst>
-    <p:notesMasterId r:id="rId12"/>
+    <p:notesMasterId r:id="rId11"/>
   </p:notesMasterIdLst>
   <p:sldIdLst>
     <p:sldId id="256" r:id="rId2"/>
@@ -16,8 +16,7 @@
     <p:sldId id="262" r:id="rId7"/>
     <p:sldId id="263" r:id="rId8"/>
     <p:sldId id="264" r:id="rId9"/>
-    <p:sldId id="265" r:id="rId10"/>
-    <p:sldId id="266" r:id="rId11"/>
+    <p:sldId id="266" r:id="rId10"/>
   </p:sldIdLst>
   <p:sldSz cx="12192000" cy="6858000"/>
   <p:notesSz cx="6858000" cy="9144000"/>
@@ -209,7 +208,7 @@
           <a:p>
             <a:fld id="{0CCF7D7F-57FA-454B-ADFF-40CD2B28A34E}" type="datetimeFigureOut">
               <a:rPr lang="en-CA" smtClean="0"/>
-              <a:t>2025-12-17</a:t>
+              <a:t>2025-12-21</a:t>
             </a:fld>
             <a:endParaRPr lang="en-CA"/>
           </a:p>
@@ -542,7 +541,7 @@
           <a:p>
             <a:fld id="{ED0A7EB1-5169-4DD4-8627-5B61858F22EE}" type="slidenum">
               <a:rPr lang="en-CA" smtClean="0"/>
-              <a:t>9</a:t>
+              <a:t>4</a:t>
             </a:fld>
             <a:endParaRPr lang="en-CA"/>
           </a:p>
@@ -551,7 +550,91 @@
     </p:spTree>
     <p:extLst>
       <p:ext uri="{BB962C8B-B14F-4D97-AF65-F5344CB8AC3E}">
-        <p14:creationId xmlns:p14="http://schemas.microsoft.com/office/powerpoint/2010/main" val="4103482046"/>
+        <p14:creationId xmlns:p14="http://schemas.microsoft.com/office/powerpoint/2010/main" val="3922788729"/>
+      </p:ext>
+    </p:extLst>
+  </p:cSld>
+  <p:clrMapOvr>
+    <a:masterClrMapping/>
+  </p:clrMapOvr>
+</p:notes>
+</file>
+
+<file path=ppt/notesSlides/notesSlide2.xml><?xml version="1.0" encoding="utf-8"?>
+<p:notes xmlns:a="http://schemas.openxmlformats.org/drawingml/2006/main" xmlns:r="http://schemas.openxmlformats.org/officeDocument/2006/relationships" xmlns:p="http://schemas.openxmlformats.org/presentationml/2006/main">
+  <p:cSld>
+    <p:spTree>
+      <p:nvGrpSpPr>
+        <p:cNvPr id="1" name=""/>
+        <p:cNvGrpSpPr/>
+        <p:nvPr/>
+      </p:nvGrpSpPr>
+      <p:grpSpPr>
+        <a:xfrm>
+          <a:off x="0" y="0"/>
+          <a:ext cx="0" cy="0"/>
+          <a:chOff x="0" y="0"/>
+          <a:chExt cx="0" cy="0"/>
+        </a:xfrm>
+      </p:grpSpPr>
+      <p:sp>
+        <p:nvSpPr>
+          <p:cNvPr id="2" name="Slide Image Placeholder 1"/>
+          <p:cNvSpPr>
+            <a:spLocks noGrp="1" noRot="1" noChangeAspect="1"/>
+          </p:cNvSpPr>
+          <p:nvPr>
+            <p:ph type="sldImg"/>
+          </p:nvPr>
+        </p:nvSpPr>
+        <p:spPr/>
+      </p:sp>
+      <p:sp>
+        <p:nvSpPr>
+          <p:cNvPr id="3" name="Notes Placeholder 2"/>
+          <p:cNvSpPr>
+            <a:spLocks noGrp="1"/>
+          </p:cNvSpPr>
+          <p:nvPr>
+            <p:ph type="body" idx="1"/>
+          </p:nvPr>
+        </p:nvSpPr>
+        <p:spPr/>
+        <p:txBody>
+          <a:bodyPr/>
+          <a:lstStyle/>
+          <a:p>
+            <a:endParaRPr lang="en-CA" dirty="0"/>
+          </a:p>
+        </p:txBody>
+      </p:sp>
+      <p:sp>
+        <p:nvSpPr>
+          <p:cNvPr id="4" name="Slide Number Placeholder 3"/>
+          <p:cNvSpPr>
+            <a:spLocks noGrp="1"/>
+          </p:cNvSpPr>
+          <p:nvPr>
+            <p:ph type="sldNum" sz="quarter" idx="5"/>
+          </p:nvPr>
+        </p:nvSpPr>
+        <p:spPr/>
+        <p:txBody>
+          <a:bodyPr/>
+          <a:lstStyle/>
+          <a:p>
+            <a:fld id="{ED0A7EB1-5169-4DD4-8627-5B61858F22EE}" type="slidenum">
+              <a:rPr lang="en-CA" smtClean="0"/>
+              <a:t>5</a:t>
+            </a:fld>
+            <a:endParaRPr lang="en-CA"/>
+          </a:p>
+        </p:txBody>
+      </p:sp>
+    </p:spTree>
+    <p:extLst>
+      <p:ext uri="{BB962C8B-B14F-4D97-AF65-F5344CB8AC3E}">
+        <p14:creationId xmlns:p14="http://schemas.microsoft.com/office/powerpoint/2010/main" val="375249569"/>
       </p:ext>
     </p:extLst>
   </p:cSld>
@@ -710,7 +793,7 @@
           <a:p>
             <a:fld id="{562E46CE-E927-4B04-8DB4-9E95747D27E8}" type="datetimeFigureOut">
               <a:rPr lang="en-CA" smtClean="0"/>
-              <a:t>2025-12-17</a:t>
+              <a:t>2025-12-21</a:t>
             </a:fld>
             <a:endParaRPr lang="en-CA"/>
           </a:p>
@@ -910,7 +993,7 @@
           <a:p>
             <a:fld id="{562E46CE-E927-4B04-8DB4-9E95747D27E8}" type="datetimeFigureOut">
               <a:rPr lang="en-CA" smtClean="0"/>
-              <a:t>2025-12-17</a:t>
+              <a:t>2025-12-21</a:t>
             </a:fld>
             <a:endParaRPr lang="en-CA"/>
           </a:p>
@@ -1120,7 +1203,7 @@
           <a:p>
             <a:fld id="{562E46CE-E927-4B04-8DB4-9E95747D27E8}" type="datetimeFigureOut">
               <a:rPr lang="en-CA" smtClean="0"/>
-              <a:t>2025-12-17</a:t>
+              <a:t>2025-12-21</a:t>
             </a:fld>
             <a:endParaRPr lang="en-CA"/>
           </a:p>
@@ -1320,7 +1403,7 @@
           <a:p>
             <a:fld id="{562E46CE-E927-4B04-8DB4-9E95747D27E8}" type="datetimeFigureOut">
               <a:rPr lang="en-CA" smtClean="0"/>
-              <a:t>2025-12-17</a:t>
+              <a:t>2025-12-21</a:t>
             </a:fld>
             <a:endParaRPr lang="en-CA"/>
           </a:p>
@@ -1596,7 +1679,7 @@
           <a:p>
             <a:fld id="{562E46CE-E927-4B04-8DB4-9E95747D27E8}" type="datetimeFigureOut">
               <a:rPr lang="en-CA" smtClean="0"/>
-              <a:t>2025-12-17</a:t>
+              <a:t>2025-12-21</a:t>
             </a:fld>
             <a:endParaRPr lang="en-CA"/>
           </a:p>
@@ -1864,7 +1947,7 @@
           <a:p>
             <a:fld id="{562E46CE-E927-4B04-8DB4-9E95747D27E8}" type="datetimeFigureOut">
               <a:rPr lang="en-CA" smtClean="0"/>
-              <a:t>2025-12-17</a:t>
+              <a:t>2025-12-21</a:t>
             </a:fld>
             <a:endParaRPr lang="en-CA"/>
           </a:p>
@@ -2279,7 +2362,7 @@
           <a:p>
             <a:fld id="{562E46CE-E927-4B04-8DB4-9E95747D27E8}" type="datetimeFigureOut">
               <a:rPr lang="en-CA" smtClean="0"/>
-              <a:t>2025-12-17</a:t>
+              <a:t>2025-12-21</a:t>
             </a:fld>
             <a:endParaRPr lang="en-CA"/>
           </a:p>
@@ -2421,7 +2504,7 @@
           <a:p>
             <a:fld id="{562E46CE-E927-4B04-8DB4-9E95747D27E8}" type="datetimeFigureOut">
               <a:rPr lang="en-CA" smtClean="0"/>
-              <a:t>2025-12-17</a:t>
+              <a:t>2025-12-21</a:t>
             </a:fld>
             <a:endParaRPr lang="en-CA"/>
           </a:p>
@@ -2534,7 +2617,7 @@
           <a:p>
             <a:fld id="{562E46CE-E927-4B04-8DB4-9E95747D27E8}" type="datetimeFigureOut">
               <a:rPr lang="en-CA" smtClean="0"/>
-              <a:t>2025-12-17</a:t>
+              <a:t>2025-12-21</a:t>
             </a:fld>
             <a:endParaRPr lang="en-CA"/>
           </a:p>
@@ -2847,7 +2930,7 @@
           <a:p>
             <a:fld id="{562E46CE-E927-4B04-8DB4-9E95747D27E8}" type="datetimeFigureOut">
               <a:rPr lang="en-CA" smtClean="0"/>
-              <a:t>2025-12-17</a:t>
+              <a:t>2025-12-21</a:t>
             </a:fld>
             <a:endParaRPr lang="en-CA"/>
           </a:p>
@@ -3136,7 +3219,7 @@
           <a:p>
             <a:fld id="{562E46CE-E927-4B04-8DB4-9E95747D27E8}" type="datetimeFigureOut">
               <a:rPr lang="en-CA" smtClean="0"/>
-              <a:t>2025-12-17</a:t>
+              <a:t>2025-12-21</a:t>
             </a:fld>
             <a:endParaRPr lang="en-CA"/>
           </a:p>
@@ -3379,7 +3462,7 @@
           <a:p>
             <a:fld id="{562E46CE-E927-4B04-8DB4-9E95747D27E8}" type="datetimeFigureOut">
               <a:rPr lang="en-CA" smtClean="0"/>
-              <a:t>2025-12-17</a:t>
+              <a:t>2025-12-21</a:t>
             </a:fld>
             <a:endParaRPr lang="en-CA"/>
           </a:p>
@@ -3926,70 +4009,6 @@
 </p:sld>
 </file>
 
-<file path=ppt/slides/slide10.xml><?xml version="1.0" encoding="utf-8"?>
-<p:sld xmlns:a="http://schemas.openxmlformats.org/drawingml/2006/main" xmlns:r="http://schemas.openxmlformats.org/officeDocument/2006/relationships" xmlns:p="http://schemas.openxmlformats.org/presentationml/2006/main">
-  <p:cSld>
-    <p:spTree>
-      <p:nvGrpSpPr>
-        <p:cNvPr id="1" name=""/>
-        <p:cNvGrpSpPr/>
-        <p:nvPr/>
-      </p:nvGrpSpPr>
-      <p:grpSpPr>
-        <a:xfrm>
-          <a:off x="0" y="0"/>
-          <a:ext cx="0" cy="0"/>
-          <a:chOff x="0" y="0"/>
-          <a:chExt cx="0" cy="0"/>
-        </a:xfrm>
-      </p:grpSpPr>
-      <p:sp>
-        <p:nvSpPr>
-          <p:cNvPr id="2" name="Title 1">
-            <a:extLst>
-              <a:ext uri="{FF2B5EF4-FFF2-40B4-BE49-F238E27FC236}">
-                <a16:creationId xmlns:a16="http://schemas.microsoft.com/office/drawing/2014/main" id="{7AA07AD6-2113-4E6E-ECFD-D3BE07ED471A}"/>
-              </a:ext>
-            </a:extLst>
-          </p:cNvPr>
-          <p:cNvSpPr>
-            <a:spLocks noGrp="1"/>
-          </p:cNvSpPr>
-          <p:nvPr>
-            <p:ph type="title"/>
-          </p:nvPr>
-        </p:nvSpPr>
-        <p:spPr>
-          <a:xfrm>
-            <a:off x="351817" y="2766218"/>
-            <a:ext cx="10515600" cy="1325563"/>
-          </a:xfrm>
-        </p:spPr>
-        <p:txBody>
-          <a:bodyPr/>
-          <a:lstStyle/>
-          <a:p>
-            <a:r>
-              <a:rPr lang="en-US" dirty="0"/>
-              <a:t>                                         END</a:t>
-            </a:r>
-            <a:endParaRPr lang="en-CA" dirty="0"/>
-          </a:p>
-        </p:txBody>
-      </p:sp>
-    </p:spTree>
-    <p:extLst>
-      <p:ext uri="{BB962C8B-B14F-4D97-AF65-F5344CB8AC3E}">
-        <p14:creationId xmlns:p14="http://schemas.microsoft.com/office/powerpoint/2010/main" val="2719325029"/>
-      </p:ext>
-    </p:extLst>
-  </p:cSld>
-  <p:clrMapOvr>
-    <a:masterClrMapping/>
-  </p:clrMapOvr>
-</p:sld>
-</file>
-
 <file path=ppt/slides/slide2.xml><?xml version="1.0" encoding="utf-8"?>
 <p:sld xmlns:a="http://schemas.openxmlformats.org/drawingml/2006/main" xmlns:r="http://schemas.openxmlformats.org/officeDocument/2006/relationships" xmlns:p="http://schemas.openxmlformats.org/presentationml/2006/main">
   <p:cSld>
@@ -4037,8 +4056,28 @@
           <a:lstStyle/>
           <a:p>
             <a:r>
+              <a:rPr lang="ru-RU" dirty="0"/>
+              <a:t>1. </a:t>
+            </a:r>
+            <a:r>
               <a:rPr lang="en-US" dirty="0"/>
-              <a:t>Sum of x₁ = -0.893827 with 999 additions of x₂ = 0.787827</a:t>
+              <a:t>Sum of x₁ =  -0.89382715639</a:t>
+            </a:r>
+            <a:r>
+              <a:rPr lang="ru-RU" dirty="0"/>
+              <a:t> </a:t>
+            </a:r>
+            <a:r>
+              <a:rPr lang="en-US" dirty="0"/>
+              <a:t>with 999</a:t>
+            </a:r>
+            <a:r>
+              <a:rPr lang="ru-RU" dirty="0"/>
+              <a:t>999</a:t>
+            </a:r>
+            <a:r>
+              <a:rPr lang="en-US" dirty="0"/>
+              <a:t> additions of x₂ = 0.7878271567</a:t>
             </a:r>
             <a:endParaRPr lang="en-CA" dirty="0"/>
           </a:p>
@@ -4046,19 +4085,17 @@
       </p:sp>
       <p:pic>
         <p:nvPicPr>
-          <p:cNvPr id="11" name="Content Placeholder 10">
-            <a:extLst>
-              <a:ext uri="{FF2B5EF4-FFF2-40B4-BE49-F238E27FC236}">
-                <a16:creationId xmlns:a16="http://schemas.microsoft.com/office/drawing/2014/main" id="{193A6575-D8BF-062C-1AC7-B793048AF38C}"/>
+          <p:cNvPr id="7" name="Picture 6">
+            <a:extLst>
+              <a:ext uri="{FF2B5EF4-FFF2-40B4-BE49-F238E27FC236}">
+                <a16:creationId xmlns:a16="http://schemas.microsoft.com/office/drawing/2014/main" id="{DCDFDD72-03B7-4EAA-13E4-DA11D2C7A11F}"/>
               </a:ext>
             </a:extLst>
           </p:cNvPr>
           <p:cNvPicPr>
-            <a:picLocks noGrp="1" noChangeAspect="1"/>
+            <a:picLocks noChangeAspect="1"/>
           </p:cNvPicPr>
-          <p:nvPr>
-            <p:ph idx="4294967295"/>
-          </p:nvPr>
+          <p:nvPr/>
         </p:nvPicPr>
         <p:blipFill>
           <a:blip r:embed="rId2">
@@ -4074,8 +4111,8 @@
         </p:blipFill>
         <p:spPr>
           <a:xfrm>
-            <a:off x="838200" y="1690688"/>
-            <a:ext cx="9245600" cy="5167312"/>
+            <a:off x="729343" y="1853304"/>
+            <a:ext cx="10515600" cy="5004696"/>
           </a:xfrm>
           <a:prstGeom prst="rect">
             <a:avLst/>
@@ -4175,41 +4212,7 @@
                 <a:ea typeface="+mj-ea"/>
                 <a:cs typeface="+mj-cs"/>
               </a:rPr>
-              <a:t>Sum of x₁ = -0.893827 with 999</a:t>
-            </a:r>
-            <a:r>
-              <a:rPr kumimoji="0" lang="ru-RU" sz="4400" b="0" i="0" u="none" strike="noStrike" kern="1200" cap="none" spc="0" normalizeH="0" baseline="0" noProof="0" dirty="0">
-                <a:ln>
-                  <a:noFill/>
-                </a:ln>
-                <a:solidFill>
-                  <a:prstClr val="black"/>
-                </a:solidFill>
-                <a:effectLst/>
-                <a:uLnTx/>
-                <a:uFillTx/>
-                <a:latin typeface="Aptos Display" panose="02110004020202020204"/>
-                <a:ea typeface="+mj-ea"/>
-                <a:cs typeface="+mj-cs"/>
-              </a:rPr>
-              <a:t>9</a:t>
-            </a:r>
-            <a:r>
-              <a:rPr kumimoji="0" lang="en-US" sz="4400" b="0" i="0" u="none" strike="noStrike" kern="1200" cap="none" spc="0" normalizeH="0" baseline="0" noProof="0" dirty="0">
-                <a:ln>
-                  <a:noFill/>
-                </a:ln>
-                <a:solidFill>
-                  <a:prstClr val="black"/>
-                </a:solidFill>
-                <a:effectLst/>
-                <a:uLnTx/>
-                <a:uFillTx/>
-                <a:latin typeface="Aptos Display" panose="02110004020202020204"/>
-                <a:ea typeface="+mj-ea"/>
-                <a:cs typeface="+mj-cs"/>
-              </a:rPr>
-              <a:t> additions of x₂ = 0.787827</a:t>
+              <a:t>Sum of x₁ =  0.89382715639 with 999999 additions of x₂ = 0.7878271567</a:t>
             </a:r>
             <a:endParaRPr lang="en-CA" dirty="0"/>
           </a:p>
@@ -4217,19 +4220,17 @@
       </p:sp>
       <p:pic>
         <p:nvPicPr>
-          <p:cNvPr id="5" name="Content Placeholder 4">
-            <a:extLst>
-              <a:ext uri="{FF2B5EF4-FFF2-40B4-BE49-F238E27FC236}">
-                <a16:creationId xmlns:a16="http://schemas.microsoft.com/office/drawing/2014/main" id="{B0A272AB-9019-63DA-25A9-F841BF20727B}"/>
+          <p:cNvPr id="9" name="Picture 8">
+            <a:extLst>
+              <a:ext uri="{FF2B5EF4-FFF2-40B4-BE49-F238E27FC236}">
+                <a16:creationId xmlns:a16="http://schemas.microsoft.com/office/drawing/2014/main" id="{C8603255-5BD9-0D73-8262-D30D13642051}"/>
               </a:ext>
             </a:extLst>
           </p:cNvPr>
           <p:cNvPicPr>
-            <a:picLocks noGrp="1" noChangeAspect="1"/>
+            <a:picLocks noChangeAspect="1"/>
           </p:cNvPicPr>
-          <p:nvPr>
-            <p:ph idx="4294967295"/>
-          </p:nvPr>
+          <p:nvPr/>
         </p:nvPicPr>
         <p:blipFill>
           <a:blip r:embed="rId2">
@@ -4239,15 +4240,14 @@
               </a:ext>
             </a:extLst>
           </a:blip>
-          <a:srcRect t="461"/>
           <a:stretch>
             <a:fillRect/>
           </a:stretch>
         </p:blipFill>
         <p:spPr>
           <a:xfrm>
-            <a:off x="0" y="1690688"/>
-            <a:ext cx="12192000" cy="6074719"/>
+            <a:off x="838200" y="1811077"/>
+            <a:ext cx="10515600" cy="4455046"/>
           </a:xfrm>
           <a:prstGeom prst="rect">
             <a:avLst/>
@@ -4345,7 +4345,7 @@
                 <a:ea typeface="+mj-ea"/>
                 <a:cs typeface="+mj-cs"/>
               </a:rPr>
-              <a:t>Sum of x₁ = -0.893827 with 9999</a:t>
+              <a:t>Sum of x₁ = 89382715639</a:t>
             </a:r>
             <a:r>
               <a:rPr kumimoji="0" lang="ru-RU" sz="4400" b="0" i="0" u="none" strike="noStrike" kern="1200" cap="none" spc="0" normalizeH="0" baseline="0" noProof="0" dirty="0">
@@ -4362,7 +4362,7 @@
                 <a:ea typeface="+mj-ea"/>
                 <a:cs typeface="+mj-cs"/>
               </a:rPr>
-              <a:t>9</a:t>
+              <a:t> </a:t>
             </a:r>
             <a:r>
               <a:rPr kumimoji="0" lang="en-US" sz="4400" b="0" i="0" u="none" strike="noStrike" kern="1200" cap="none" spc="0" normalizeH="0" baseline="0" noProof="0" dirty="0">
@@ -4379,7 +4379,41 @@
                 <a:ea typeface="+mj-ea"/>
                 <a:cs typeface="+mj-cs"/>
               </a:rPr>
-              <a:t> additions of x₂ = 0.787827</a:t>
+              <a:t>with 9999</a:t>
+            </a:r>
+            <a:r>
+              <a:rPr kumimoji="0" lang="ru-RU" sz="4400" b="0" i="0" u="none" strike="noStrike" kern="1200" cap="none" spc="0" normalizeH="0" baseline="0" noProof="0" dirty="0">
+                <a:ln>
+                  <a:noFill/>
+                </a:ln>
+                <a:solidFill>
+                  <a:prstClr val="black"/>
+                </a:solidFill>
+                <a:effectLst/>
+                <a:uLnTx/>
+                <a:uFillTx/>
+                <a:latin typeface="Aptos Display" panose="02110004020202020204"/>
+                <a:ea typeface="+mj-ea"/>
+                <a:cs typeface="+mj-cs"/>
+              </a:rPr>
+              <a:t>99</a:t>
+            </a:r>
+            <a:r>
+              <a:rPr kumimoji="0" lang="en-US" sz="4400" b="0" i="0" u="none" strike="noStrike" kern="1200" cap="none" spc="0" normalizeH="0" baseline="0" noProof="0" dirty="0">
+                <a:ln>
+                  <a:noFill/>
+                </a:ln>
+                <a:solidFill>
+                  <a:prstClr val="black"/>
+                </a:solidFill>
+                <a:effectLst/>
+                <a:uLnTx/>
+                <a:uFillTx/>
+                <a:latin typeface="Aptos Display" panose="02110004020202020204"/>
+                <a:ea typeface="+mj-ea"/>
+                <a:cs typeface="+mj-cs"/>
+              </a:rPr>
+              <a:t> additions of x₂ =  7878271567</a:t>
             </a:r>
             <a:endParaRPr lang="en-CA" dirty="0"/>
           </a:p>
@@ -4387,10 +4421,10 @@
       </p:sp>
       <p:pic>
         <p:nvPicPr>
-          <p:cNvPr id="8" name="Picture 7">
-            <a:extLst>
-              <a:ext uri="{FF2B5EF4-FFF2-40B4-BE49-F238E27FC236}">
-                <a16:creationId xmlns:a16="http://schemas.microsoft.com/office/drawing/2014/main" id="{177B0F66-3F57-F2BB-465A-2B42C80ABBD5}"/>
+          <p:cNvPr id="5" name="Picture 4">
+            <a:extLst>
+              <a:ext uri="{FF2B5EF4-FFF2-40B4-BE49-F238E27FC236}">
+                <a16:creationId xmlns:a16="http://schemas.microsoft.com/office/drawing/2014/main" id="{4579F169-8195-175A-CBF3-671803328AD4}"/>
               </a:ext>
             </a:extLst>
           </p:cNvPr>
@@ -4400,21 +4434,15 @@
           <p:nvPr/>
         </p:nvPicPr>
         <p:blipFill>
-          <a:blip r:embed="rId2">
-            <a:extLst>
-              <a:ext uri="{28A0092B-C50C-407E-A947-70E740481C1C}">
-                <a14:useLocalDpi xmlns:a14="http://schemas.microsoft.com/office/drawing/2010/main" val="0"/>
-              </a:ext>
-            </a:extLst>
-          </a:blip>
+          <a:blip r:embed="rId3"/>
           <a:stretch>
             <a:fillRect/>
           </a:stretch>
         </p:blipFill>
         <p:spPr>
           <a:xfrm>
-            <a:off x="575194" y="1690688"/>
-            <a:ext cx="11616806" cy="5174215"/>
+            <a:off x="838200" y="1915886"/>
+            <a:ext cx="10515600" cy="4942114"/>
           </a:xfrm>
           <a:prstGeom prst="rect">
             <a:avLst/>
@@ -4529,7 +4557,7 @@
                 <a:ea typeface="+mj-ea"/>
                 <a:cs typeface="+mj-cs"/>
               </a:rPr>
-              <a:t>Sum of x₁ = -0.893827 with 9999</a:t>
+              <a:t>Sum of x₁ = 89382715639e+15 with 9999</a:t>
             </a:r>
             <a:r>
               <a:rPr kumimoji="0" lang="ru-RU" sz="4400" b="0" i="0" u="none" strike="noStrike" kern="1200" cap="none" spc="0" normalizeH="0" baseline="0" noProof="0" dirty="0">
@@ -4563,7 +4591,7 @@
                 <a:ea typeface="+mj-ea"/>
                 <a:cs typeface="+mj-cs"/>
               </a:rPr>
-              <a:t> additions of x₂ = 0.787827</a:t>
+              <a:t> additions of x₂ = 7878271567e+23</a:t>
             </a:r>
             <a:endParaRPr lang="en-CA" dirty="0"/>
           </a:p>
@@ -4571,10 +4599,10 @@
       </p:sp>
       <p:pic>
         <p:nvPicPr>
-          <p:cNvPr id="10" name="Picture 9">
-            <a:extLst>
-              <a:ext uri="{FF2B5EF4-FFF2-40B4-BE49-F238E27FC236}">
-                <a16:creationId xmlns:a16="http://schemas.microsoft.com/office/drawing/2014/main" id="{93D87B2F-C4A0-437B-186F-E81E371A1DE4}"/>
+          <p:cNvPr id="5" name="Picture 4">
+            <a:extLst>
+              <a:ext uri="{FF2B5EF4-FFF2-40B4-BE49-F238E27FC236}">
+                <a16:creationId xmlns:a16="http://schemas.microsoft.com/office/drawing/2014/main" id="{22BE833B-71C7-312F-4F7D-4A887D2208AF}"/>
               </a:ext>
             </a:extLst>
           </p:cNvPr>
@@ -4584,7 +4612,7 @@
           <p:nvPr/>
         </p:nvPicPr>
         <p:blipFill>
-          <a:blip r:embed="rId2">
+          <a:blip r:embed="rId3">
             <a:extLst>
               <a:ext uri="{28A0092B-C50C-407E-A947-70E740481C1C}">
                 <a14:useLocalDpi xmlns:a14="http://schemas.microsoft.com/office/drawing/2010/main" val="0"/>
@@ -4597,8 +4625,8 @@
         </p:blipFill>
         <p:spPr>
           <a:xfrm>
-            <a:off x="572534" y="1690688"/>
-            <a:ext cx="11619466" cy="5395912"/>
+            <a:off x="0" y="1954357"/>
+            <a:ext cx="12192000" cy="5278830"/>
           </a:xfrm>
           <a:prstGeom prst="rect">
             <a:avLst/>
@@ -4715,7 +4743,62 @@
                 <a:ea typeface="+mj-ea"/>
                 <a:cs typeface="+mj-cs"/>
               </a:rPr>
-              <a:t>Sum of x₁ = -8</a:t>
+              <a:t>Sum of x₁ = </a:t>
+            </a:r>
+            <a:r>
+              <a:rPr lang="en-CA" sz="4400" dirty="0">
+                <a:solidFill>
+                  <a:srgbClr val="000000"/>
+                </a:solidFill>
+                <a:highlight>
+                  <a:srgbClr val="FFFFFF"/>
+                </a:highlight>
+                <a:latin typeface="Cascadia Mono" panose="020B0609020000020004" pitchFamily="49" charset="0"/>
+              </a:rPr>
+              <a:t>838.678 </a:t>
+            </a:r>
+            <a:r>
+              <a:rPr kumimoji="0" lang="en-US" sz="4400" b="0" i="0" u="none" strike="noStrike" kern="1200" cap="none" spc="0" normalizeH="0" baseline="0" noProof="0" dirty="0">
+                <a:ln>
+                  <a:noFill/>
+                </a:ln>
+                <a:solidFill>
+                  <a:prstClr val="black"/>
+                </a:solidFill>
+                <a:effectLst/>
+                <a:uLnTx/>
+                <a:uFillTx/>
+                <a:latin typeface="Aptos Display" panose="02110004020202020204"/>
+                <a:ea typeface="+mj-ea"/>
+                <a:cs typeface="+mj-cs"/>
+              </a:rPr>
+              <a:t>with 999</a:t>
+            </a:r>
+            <a:r>
+              <a:rPr lang="en-US" dirty="0">
+                <a:solidFill>
+                  <a:prstClr val="black"/>
+                </a:solidFill>
+                <a:latin typeface="Aptos Display" panose="02110004020202020204"/>
+              </a:rPr>
+              <a:t>9999</a:t>
+            </a:r>
+            <a:r>
+              <a:rPr kumimoji="0" lang="en-US" sz="4400" b="0" i="0" u="none" strike="noStrike" kern="1200" cap="none" spc="0" normalizeH="0" baseline="0" noProof="0" dirty="0">
+                <a:ln>
+                  <a:noFill/>
+                </a:ln>
+                <a:solidFill>
+                  <a:prstClr val="black"/>
+                </a:solidFill>
+                <a:effectLst/>
+                <a:uLnTx/>
+                <a:uFillTx/>
+                <a:latin typeface="Aptos Display" panose="02110004020202020204"/>
+                <a:ea typeface="+mj-ea"/>
+                <a:cs typeface="+mj-cs"/>
+              </a:rPr>
+              <a:t> additions of x₂ = 7</a:t>
             </a:r>
             <a:r>
               <a:rPr kumimoji="0" lang="ru-RU" sz="4400" b="0" i="0" u="none" strike="noStrike" kern="1200" cap="none" spc="0" normalizeH="0" baseline="0" noProof="0" dirty="0">
@@ -4749,41 +4832,7 @@
                 <a:ea typeface="+mj-ea"/>
                 <a:cs typeface="+mj-cs"/>
               </a:rPr>
-              <a:t>93827e+10  with 999 additions of x₂ = 7</a:t>
-            </a:r>
-            <a:r>
-              <a:rPr kumimoji="0" lang="ru-RU" sz="4400" b="0" i="0" u="none" strike="noStrike" kern="1200" cap="none" spc="0" normalizeH="0" baseline="0" noProof="0" dirty="0">
-                <a:ln>
-                  <a:noFill/>
-                </a:ln>
-                <a:solidFill>
-                  <a:prstClr val="black"/>
-                </a:solidFill>
-                <a:effectLst/>
-                <a:uLnTx/>
-                <a:uFillTx/>
-                <a:latin typeface="Aptos Display" panose="02110004020202020204"/>
-                <a:ea typeface="+mj-ea"/>
-                <a:cs typeface="+mj-cs"/>
-              </a:rPr>
-              <a:t>.</a:t>
-            </a:r>
-            <a:r>
-              <a:rPr kumimoji="0" lang="en-US" sz="4400" b="0" i="0" u="none" strike="noStrike" kern="1200" cap="none" spc="0" normalizeH="0" baseline="0" noProof="0" dirty="0">
-                <a:ln>
-                  <a:noFill/>
-                </a:ln>
-                <a:solidFill>
-                  <a:prstClr val="black"/>
-                </a:solidFill>
-                <a:effectLst/>
-                <a:uLnTx/>
-                <a:uFillTx/>
-                <a:latin typeface="Aptos Display" panose="02110004020202020204"/>
-                <a:ea typeface="+mj-ea"/>
-                <a:cs typeface="+mj-cs"/>
-              </a:rPr>
-              <a:t>87827e+09</a:t>
+              <a:t>87827e+76.236</a:t>
             </a:r>
             <a:endParaRPr lang="en-CA" dirty="0"/>
           </a:p>
@@ -4791,19 +4840,17 @@
       </p:sp>
       <p:pic>
         <p:nvPicPr>
-          <p:cNvPr id="5" name="Content Placeholder 4">
-            <a:extLst>
-              <a:ext uri="{FF2B5EF4-FFF2-40B4-BE49-F238E27FC236}">
-                <a16:creationId xmlns:a16="http://schemas.microsoft.com/office/drawing/2014/main" id="{F5E3D93B-9CA6-111A-050B-8C983BE1CA03}"/>
+          <p:cNvPr id="9" name="Picture 8">
+            <a:extLst>
+              <a:ext uri="{FF2B5EF4-FFF2-40B4-BE49-F238E27FC236}">
+                <a16:creationId xmlns:a16="http://schemas.microsoft.com/office/drawing/2014/main" id="{F536CCCF-F8A0-B684-92AE-38AF56DA0F3C}"/>
               </a:ext>
             </a:extLst>
           </p:cNvPr>
           <p:cNvPicPr>
-            <a:picLocks noGrp="1" noChangeAspect="1"/>
+            <a:picLocks noChangeAspect="1"/>
           </p:cNvPicPr>
-          <p:nvPr>
-            <p:ph idx="4294967295"/>
-          </p:nvPr>
+          <p:nvPr/>
         </p:nvPicPr>
         <p:blipFill>
           <a:blip r:embed="rId2">
@@ -4819,7 +4866,7 @@
         </p:blipFill>
         <p:spPr>
           <a:xfrm>
-            <a:off x="707571" y="1690688"/>
+            <a:off x="925286" y="1690688"/>
             <a:ext cx="10515600" cy="5167312"/>
           </a:xfrm>
           <a:prstGeom prst="rect">
@@ -4935,7 +4982,7 @@
                 <a:ea typeface="+mj-ea"/>
                 <a:cs typeface="+mj-cs"/>
               </a:rPr>
-              <a:t>Sum of x₁ = -8.93827e+10  with 9999 additions of x₂ = 7.87827e+09</a:t>
+              <a:t>Sum of x₁ = 1234  with 999999 additions of x₂ = 765432</a:t>
             </a:r>
             <a:endParaRPr lang="en-CA" dirty="0"/>
           </a:p>
@@ -4943,19 +4990,17 @@
       </p:sp>
       <p:pic>
         <p:nvPicPr>
-          <p:cNvPr id="5" name="Content Placeholder 4">
-            <a:extLst>
-              <a:ext uri="{FF2B5EF4-FFF2-40B4-BE49-F238E27FC236}">
-                <a16:creationId xmlns:a16="http://schemas.microsoft.com/office/drawing/2014/main" id="{4A56E858-AFB2-A7C3-775C-8B2DBC1F9990}"/>
+          <p:cNvPr id="3" name="Picture 2">
+            <a:extLst>
+              <a:ext uri="{FF2B5EF4-FFF2-40B4-BE49-F238E27FC236}">
+                <a16:creationId xmlns:a16="http://schemas.microsoft.com/office/drawing/2014/main" id="{FD1399C2-A2D5-4D52-B00B-963643C9CAB1}"/>
               </a:ext>
             </a:extLst>
           </p:cNvPr>
           <p:cNvPicPr>
-            <a:picLocks noGrp="1" noChangeAspect="1"/>
+            <a:picLocks noChangeAspect="1"/>
           </p:cNvPicPr>
-          <p:nvPr>
-            <p:ph idx="4294967295"/>
-          </p:nvPr>
+          <p:nvPr/>
         </p:nvPicPr>
         <p:blipFill>
           <a:blip r:embed="rId2">
@@ -4971,8 +5016,8 @@
         </p:blipFill>
         <p:spPr>
           <a:xfrm>
-            <a:off x="585281" y="1963063"/>
-            <a:ext cx="10515600" cy="4894937"/>
+            <a:off x="838199" y="1690688"/>
+            <a:ext cx="10003971" cy="5167312"/>
           </a:xfrm>
           <a:prstGeom prst="rect">
             <a:avLst/>
@@ -5097,19 +5142,17 @@
       </p:sp>
       <p:pic>
         <p:nvPicPr>
-          <p:cNvPr id="5" name="Content Placeholder 4">
-            <a:extLst>
-              <a:ext uri="{FF2B5EF4-FFF2-40B4-BE49-F238E27FC236}">
-                <a16:creationId xmlns:a16="http://schemas.microsoft.com/office/drawing/2014/main" id="{41E32290-93CD-D73F-B84B-7DCE8BC267B0}"/>
+          <p:cNvPr id="3" name="Picture 2">
+            <a:extLst>
+              <a:ext uri="{FF2B5EF4-FFF2-40B4-BE49-F238E27FC236}">
+                <a16:creationId xmlns:a16="http://schemas.microsoft.com/office/drawing/2014/main" id="{1F585A76-9BC3-4401-F241-A51280BAA016}"/>
               </a:ext>
             </a:extLst>
           </p:cNvPr>
           <p:cNvPicPr>
-            <a:picLocks noGrp="1" noChangeAspect="1"/>
+            <a:picLocks noChangeAspect="1"/>
           </p:cNvPicPr>
-          <p:nvPr>
-            <p:ph idx="4294967295"/>
-          </p:nvPr>
+          <p:nvPr/>
         </p:nvPicPr>
         <p:blipFill>
           <a:blip r:embed="rId2">
@@ -5125,8 +5168,8 @@
         </p:blipFill>
         <p:spPr>
           <a:xfrm>
-            <a:off x="957943" y="1690689"/>
-            <a:ext cx="9483725" cy="5167312"/>
+            <a:off x="766281" y="1584227"/>
+            <a:ext cx="10515599" cy="5273773"/>
           </a:xfrm>
           <a:prstGeom prst="rect">
             <a:avLst/>
@@ -5149,14 +5192,6 @@
 <file path=ppt/slides/slide9.xml><?xml version="1.0" encoding="utf-8"?>
 <p:sld xmlns:a="http://schemas.openxmlformats.org/drawingml/2006/main" xmlns:r="http://schemas.openxmlformats.org/officeDocument/2006/relationships" xmlns:p="http://schemas.openxmlformats.org/presentationml/2006/main">
   <p:cSld>
-    <p:bg>
-      <p:bgPr>
-        <a:solidFill>
-          <a:schemeClr val="bg1"/>
-        </a:solidFill>
-        <a:effectLst/>
-      </p:bgPr>
-    </p:bg>
     <p:spTree>
       <p:nvGrpSpPr>
         <p:cNvPr id="1" name=""/>
@@ -5173,10 +5208,10 @@
       </p:grpSpPr>
       <p:sp>
         <p:nvSpPr>
-          <p:cNvPr id="7" name="Title 6">
-            <a:extLst>
-              <a:ext uri="{FF2B5EF4-FFF2-40B4-BE49-F238E27FC236}">
-                <a16:creationId xmlns:a16="http://schemas.microsoft.com/office/drawing/2014/main" id="{1CB61350-3D7D-AE46-7E8C-FDC71258E6B2}"/>
+          <p:cNvPr id="2" name="Title 1">
+            <a:extLst>
+              <a:ext uri="{FF2B5EF4-FFF2-40B4-BE49-F238E27FC236}">
+                <a16:creationId xmlns:a16="http://schemas.microsoft.com/office/drawing/2014/main" id="{7AA07AD6-2113-4E6E-ECFD-D3BE07ED471A}"/>
               </a:ext>
             </a:extLst>
           </p:cNvPr>
@@ -5187,106 +5222,28 @@
             <p:ph type="title"/>
           </p:nvPr>
         </p:nvSpPr>
-        <p:spPr/>
-        <p:txBody>
-          <a:bodyPr/>
-          <a:lstStyle/>
-          <a:p>
-            <a:r>
-              <a:rPr kumimoji="0" lang="en-US" sz="4000" b="0" i="0" u="none" strike="noStrike" kern="1200" cap="none" spc="0" normalizeH="0" baseline="0" noProof="0" dirty="0">
-                <a:ln>
-                  <a:noFill/>
-                </a:ln>
-                <a:solidFill>
-                  <a:prstClr val="black"/>
-                </a:solidFill>
-                <a:effectLst/>
-                <a:uLnTx/>
-                <a:uFillTx/>
-                <a:latin typeface="Aptos Display" panose="02110004020202020204"/>
-                <a:ea typeface="+mj-ea"/>
-                <a:cs typeface="+mj-cs"/>
-              </a:rPr>
-              <a:t>8</a:t>
-            </a:r>
-            <a:r>
-              <a:rPr kumimoji="0" lang="ru-RU" sz="4000" b="0" i="0" u="none" strike="noStrike" kern="1200" cap="none" spc="0" normalizeH="0" baseline="0" noProof="0" dirty="0">
-                <a:ln>
-                  <a:noFill/>
-                </a:ln>
-                <a:solidFill>
-                  <a:prstClr val="black"/>
-                </a:solidFill>
-                <a:effectLst/>
-                <a:uLnTx/>
-                <a:uFillTx/>
-                <a:latin typeface="Aptos Display" panose="02110004020202020204"/>
-                <a:ea typeface="+mj-ea"/>
-                <a:cs typeface="+mj-cs"/>
-              </a:rPr>
-              <a:t>. </a:t>
-            </a:r>
-            <a:r>
-              <a:rPr kumimoji="0" lang="en-US" sz="4000" b="0" i="0" u="none" strike="noStrike" kern="1200" cap="none" spc="0" normalizeH="0" baseline="0" noProof="0" dirty="0">
-                <a:ln>
-                  <a:noFill/>
-                </a:ln>
-                <a:solidFill>
-                  <a:prstClr val="black"/>
-                </a:solidFill>
-                <a:effectLst/>
-                <a:uLnTx/>
-                <a:uFillTx/>
-                <a:latin typeface="Aptos Display" panose="02110004020202020204"/>
-                <a:ea typeface="+mj-ea"/>
-                <a:cs typeface="+mj-cs"/>
-              </a:rPr>
-              <a:t>Sum of x₁ = -8.93827e+10  with 999999 additions of x₂ = 7.87827e+09</a:t>
-            </a:r>
-            <a:endParaRPr lang="en-CA" dirty="0"/>
-          </a:p>
-        </p:txBody>
-      </p:sp>
-      <p:pic>
-        <p:nvPicPr>
-          <p:cNvPr id="9" name="Picture 8">
-            <a:extLst>
-              <a:ext uri="{FF2B5EF4-FFF2-40B4-BE49-F238E27FC236}">
-                <a16:creationId xmlns:a16="http://schemas.microsoft.com/office/drawing/2014/main" id="{3EFD8DB8-6377-C4E6-4F12-786705421052}"/>
-              </a:ext>
-            </a:extLst>
-          </p:cNvPr>
-          <p:cNvPicPr>
-            <a:picLocks noChangeAspect="1"/>
-          </p:cNvPicPr>
-          <p:nvPr/>
-        </p:nvPicPr>
-        <p:blipFill>
-          <a:blip r:embed="rId3">
-            <a:extLst>
-              <a:ext uri="{28A0092B-C50C-407E-A947-70E740481C1C}">
-                <a14:useLocalDpi xmlns:a14="http://schemas.microsoft.com/office/drawing/2010/main" val="0"/>
-              </a:ext>
-            </a:extLst>
-          </a:blip>
-          <a:stretch>
-            <a:fillRect/>
-          </a:stretch>
-        </p:blipFill>
         <p:spPr>
           <a:xfrm>
-            <a:off x="0" y="1883229"/>
-            <a:ext cx="11353800" cy="5829772"/>
+            <a:off x="351817" y="2766218"/>
+            <a:ext cx="10515600" cy="1325563"/>
           </a:xfrm>
-          <a:prstGeom prst="rect">
-            <a:avLst/>
-          </a:prstGeom>
         </p:spPr>
-      </p:pic>
+        <p:txBody>
+          <a:bodyPr/>
+          <a:lstStyle/>
+          <a:p>
+            <a:r>
+              <a:rPr lang="en-US" dirty="0"/>
+              <a:t>                                         END</a:t>
+            </a:r>
+            <a:endParaRPr lang="en-CA" dirty="0"/>
+          </a:p>
+        </p:txBody>
+      </p:sp>
     </p:spTree>
     <p:extLst>
       <p:ext uri="{BB962C8B-B14F-4D97-AF65-F5344CB8AC3E}">
-        <p14:creationId xmlns:p14="http://schemas.microsoft.com/office/powerpoint/2010/main" val="3983516860"/>
+        <p14:creationId xmlns:p14="http://schemas.microsoft.com/office/powerpoint/2010/main" val="2719325029"/>
       </p:ext>
     </p:extLst>
   </p:cSld>
